--- a/docs/Presentation - CoPatrulha.pptx
+++ b/docs/Presentation - CoPatrulha.pptx
@@ -14,25 +14,27 @@
     <p:sldId id="262" r:id="rId12"/>
     <p:sldId id="263" r:id="rId13"/>
     <p:sldId id="264" r:id="rId14"/>
+    <p:sldId id="265" r:id="rId15"/>
+    <p:sldId id="266" r:id="rId16"/>
   </p:sldIdLst>
   <p:sldSz cx="18288000" cy="10287000"/>
   <p:notesSz cx="6858000" cy="9144000"/>
   <p:embeddedFontLst>
     <p:embeddedFont>
       <p:font typeface="Helios Extended" charset="1" panose="02000505040000020004"/>
-      <p:regular r:id="rId15"/>
+      <p:regular r:id="rId17"/>
     </p:embeddedFont>
     <p:embeddedFont>
       <p:font typeface="Fira Sans Bold" charset="1" panose="020B0803050000020004"/>
-      <p:regular r:id="rId16"/>
+      <p:regular r:id="rId18"/>
     </p:embeddedFont>
     <p:embeddedFont>
       <p:font typeface="Fira Sans Light" charset="1" panose="020B0403050000020004"/>
-      <p:regular r:id="rId17"/>
+      <p:regular r:id="rId19"/>
     </p:embeddedFont>
     <p:embeddedFont>
       <p:font typeface="Helios Extended Bold" charset="1" panose="02000805050000020004"/>
-      <p:regular r:id="rId18"/>
+      <p:regular r:id="rId20"/>
     </p:embeddedFont>
   </p:embeddedFontLst>
   <p:defaultTextStyle>
@@ -3372,6 +3374,895 @@
 </p:sld>
 </file>
 
+<file path=ppt/slides/slide10.xml><?xml version="1.0" encoding="utf-8"?>
+<p:sld xmlns:p="http://schemas.openxmlformats.org/presentationml/2006/main" xmlns:a="http://schemas.openxmlformats.org/drawingml/2006/main">
+  <p:cSld>
+    <p:bg>
+      <p:bgPr>
+        <a:solidFill>
+          <a:srgbClr val="353533"/>
+        </a:solidFill>
+      </p:bgPr>
+    </p:bg>
+    <p:spTree>
+      <p:nvGrpSpPr>
+        <p:cNvPr id="1" name=""/>
+        <p:cNvGrpSpPr/>
+        <p:nvPr/>
+      </p:nvGrpSpPr>
+      <p:grpSpPr>
+        <a:xfrm>
+          <a:off x="0" y="0"/>
+          <a:ext cx="0" cy="0"/>
+          <a:chOff x="0" y="0"/>
+          <a:chExt cx="0" cy="0"/>
+        </a:xfrm>
+      </p:grpSpPr>
+      <p:sp>
+        <p:nvSpPr>
+          <p:cNvPr name="TextBox 2" id="2"/>
+          <p:cNvSpPr txBox="true"/>
+          <p:nvPr/>
+        </p:nvSpPr>
+        <p:spPr>
+          <a:xfrm rot="0">
+            <a:off x="666750" y="695325"/>
+            <a:ext cx="11201400" cy="2301878"/>
+          </a:xfrm>
+          <a:prstGeom prst="rect">
+            <a:avLst/>
+          </a:prstGeom>
+        </p:spPr>
+        <p:txBody>
+          <a:bodyPr anchor="t" rtlCol="false" tIns="0" lIns="0" bIns="0" rIns="0">
+            <a:spAutoFit/>
+          </a:bodyPr>
+          <a:lstStyle/>
+          <a:p>
+            <a:pPr algn="l" marL="0" indent="0" lvl="0">
+              <a:lnSpc>
+                <a:spcPts val="8800"/>
+              </a:lnSpc>
+              <a:spcBef>
+                <a:spcPct val="0"/>
+              </a:spcBef>
+            </a:pPr>
+            <a:r>
+              <a:rPr lang="en-US" sz="8000">
+                <a:solidFill>
+                  <a:srgbClr val="F6F5F2"/>
+                </a:solidFill>
+                <a:latin typeface="Helios Extended"/>
+                <a:ea typeface="Helios Extended"/>
+                <a:cs typeface="Helios Extended"/>
+                <a:sym typeface="Helios Extended"/>
+              </a:rPr>
+              <a:t>O analista volta a pensar</a:t>
+            </a:r>
+          </a:p>
+        </p:txBody>
+      </p:sp>
+      <p:grpSp>
+        <p:nvGrpSpPr>
+          <p:cNvPr name="Group 3" id="3"/>
+          <p:cNvGrpSpPr/>
+          <p:nvPr/>
+        </p:nvGrpSpPr>
+        <p:grpSpPr>
+          <a:xfrm rot="0">
+            <a:off x="666750" y="5143500"/>
+            <a:ext cx="6886575" cy="1579323"/>
+            <a:chOff x="0" y="0"/>
+            <a:chExt cx="9182100" cy="2105764"/>
+          </a:xfrm>
+        </p:grpSpPr>
+        <p:sp>
+          <p:nvSpPr>
+            <p:cNvPr name="TextBox 4" id="4"/>
+            <p:cNvSpPr txBox="true"/>
+            <p:nvPr/>
+          </p:nvSpPr>
+          <p:spPr>
+            <a:xfrm rot="0">
+              <a:off x="0" y="1157837"/>
+              <a:ext cx="9182100" cy="947927"/>
+            </a:xfrm>
+            <a:prstGeom prst="rect">
+              <a:avLst/>
+            </a:prstGeom>
+          </p:spPr>
+          <p:txBody>
+            <a:bodyPr anchor="t" rtlCol="false" tIns="0" lIns="0" bIns="0" rIns="0">
+              <a:spAutoFit/>
+            </a:bodyPr>
+            <a:lstStyle/>
+            <a:p>
+              <a:pPr algn="l" marL="0" indent="0" lvl="0">
+                <a:lnSpc>
+                  <a:spcPts val="2939"/>
+                </a:lnSpc>
+                <a:spcBef>
+                  <a:spcPct val="0"/>
+                </a:spcBef>
+              </a:pPr>
+              <a:r>
+                <a:rPr lang="en-US" sz="2099" strike="noStrike" u="none">
+                  <a:solidFill>
+                    <a:srgbClr val="F6F5F2"/>
+                  </a:solidFill>
+                  <a:latin typeface="Fira Sans Light"/>
+                  <a:ea typeface="Fira Sans Light"/>
+                  <a:cs typeface="Fira Sans Light"/>
+                  <a:sym typeface="Fira Sans Light"/>
+                </a:rPr>
+                <a:t>Com as 7 fontes integradas, o preparo cai de horas para minutos.</a:t>
+              </a:r>
+            </a:p>
+          </p:txBody>
+        </p:sp>
+        <p:sp>
+          <p:nvSpPr>
+            <p:cNvPr name="TextBox 5" id="5"/>
+            <p:cNvSpPr txBox="true"/>
+            <p:nvPr/>
+          </p:nvSpPr>
+          <p:spPr>
+            <a:xfrm rot="0">
+              <a:off x="0" y="-57150"/>
+              <a:ext cx="9182100" cy="578697"/>
+            </a:xfrm>
+            <a:prstGeom prst="rect">
+              <a:avLst/>
+            </a:prstGeom>
+          </p:spPr>
+          <p:txBody>
+            <a:bodyPr anchor="t" rtlCol="false" tIns="0" lIns="0" bIns="0" rIns="0">
+              <a:spAutoFit/>
+            </a:bodyPr>
+            <a:lstStyle/>
+            <a:p>
+              <a:pPr algn="l" marL="0" indent="0" lvl="0">
+                <a:lnSpc>
+                  <a:spcPts val="3640"/>
+                </a:lnSpc>
+              </a:pPr>
+              <a:r>
+                <a:rPr lang="en-US" b="true" sz="2600">
+                  <a:solidFill>
+                    <a:srgbClr val="F6F5F2"/>
+                  </a:solidFill>
+                  <a:latin typeface="Fira Sans Bold"/>
+                  <a:ea typeface="Fira Sans Bold"/>
+                  <a:cs typeface="Fira Sans Bold"/>
+                  <a:sym typeface="Fira Sans Bold"/>
+                </a:rPr>
+                <a:t>FONTES CRUZADAS</a:t>
+              </a:r>
+            </a:p>
+          </p:txBody>
+        </p:sp>
+      </p:grpSp>
+      <p:grpSp>
+        <p:nvGrpSpPr>
+          <p:cNvPr name="Group 6" id="6"/>
+          <p:cNvGrpSpPr/>
+          <p:nvPr/>
+        </p:nvGrpSpPr>
+        <p:grpSpPr>
+          <a:xfrm rot="0">
+            <a:off x="9296400" y="5143500"/>
+            <a:ext cx="6886575" cy="1943606"/>
+            <a:chOff x="0" y="0"/>
+            <a:chExt cx="9182100" cy="2591475"/>
+          </a:xfrm>
+        </p:grpSpPr>
+        <p:sp>
+          <p:nvSpPr>
+            <p:cNvPr name="TextBox 7" id="7"/>
+            <p:cNvSpPr txBox="true"/>
+            <p:nvPr/>
+          </p:nvSpPr>
+          <p:spPr>
+            <a:xfrm rot="0">
+              <a:off x="0" y="1157837"/>
+              <a:ext cx="9182100" cy="1433638"/>
+            </a:xfrm>
+            <a:prstGeom prst="rect">
+              <a:avLst/>
+            </a:prstGeom>
+          </p:spPr>
+          <p:txBody>
+            <a:bodyPr anchor="t" rtlCol="false" tIns="0" lIns="0" bIns="0" rIns="0">
+              <a:spAutoFit/>
+            </a:bodyPr>
+            <a:lstStyle/>
+            <a:p>
+              <a:pPr algn="l" marL="0" indent="0" lvl="0">
+                <a:lnSpc>
+                  <a:spcPts val="2939"/>
+                </a:lnSpc>
+                <a:spcBef>
+                  <a:spcPct val="0"/>
+                </a:spcBef>
+              </a:pPr>
+              <a:r>
+                <a:rPr lang="en-US" sz="2099" strike="noStrike" u="none">
+                  <a:solidFill>
+                    <a:srgbClr val="F6F5F2"/>
+                  </a:solidFill>
+                  <a:latin typeface="Fira Sans Light"/>
+                  <a:ea typeface="Fira Sans Light"/>
+                  <a:cs typeface="Fira Sans Light"/>
+                  <a:sym typeface="Fira Sans Light"/>
+                </a:rPr>
+                <a:t>A reunião continua semanal, mas a preparação para de roubar a semana e os desdobramentos ocorrem em tempo real.</a:t>
+              </a:r>
+            </a:p>
+          </p:txBody>
+        </p:sp>
+        <p:sp>
+          <p:nvSpPr>
+            <p:cNvPr name="TextBox 8" id="8"/>
+            <p:cNvSpPr txBox="true"/>
+            <p:nvPr/>
+          </p:nvSpPr>
+          <p:spPr>
+            <a:xfrm rot="0">
+              <a:off x="0" y="-57150"/>
+              <a:ext cx="9182100" cy="578697"/>
+            </a:xfrm>
+            <a:prstGeom prst="rect">
+              <a:avLst/>
+            </a:prstGeom>
+          </p:spPr>
+          <p:txBody>
+            <a:bodyPr anchor="t" rtlCol="false" tIns="0" lIns="0" bIns="0" rIns="0">
+              <a:spAutoFit/>
+            </a:bodyPr>
+            <a:lstStyle/>
+            <a:p>
+              <a:pPr algn="l" marL="0" indent="0" lvl="0">
+                <a:lnSpc>
+                  <a:spcPts val="3640"/>
+                </a:lnSpc>
+              </a:pPr>
+              <a:r>
+                <a:rPr lang="en-US" b="true" sz="2600">
+                  <a:solidFill>
+                    <a:srgbClr val="F6F5F2"/>
+                  </a:solidFill>
+                  <a:latin typeface="Fira Sans Bold"/>
+                  <a:ea typeface="Fira Sans Bold"/>
+                  <a:cs typeface="Fira Sans Bold"/>
+                  <a:sym typeface="Fira Sans Bold"/>
+                </a:rPr>
+                <a:t>DECISÃO APRIMORADA</a:t>
+              </a:r>
+            </a:p>
+          </p:txBody>
+        </p:sp>
+      </p:grpSp>
+      <p:grpSp>
+        <p:nvGrpSpPr>
+          <p:cNvPr name="Group 9" id="9"/>
+          <p:cNvGrpSpPr/>
+          <p:nvPr/>
+        </p:nvGrpSpPr>
+        <p:grpSpPr>
+          <a:xfrm rot="5400000">
+            <a:off x="9068162" y="1029062"/>
+            <a:ext cx="189775" cy="18326100"/>
+            <a:chOff x="0" y="0"/>
+            <a:chExt cx="49982" cy="4826627"/>
+          </a:xfrm>
+        </p:grpSpPr>
+        <p:sp>
+          <p:nvSpPr>
+            <p:cNvPr name="Freeform 10" id="10"/>
+            <p:cNvSpPr/>
+            <p:nvPr/>
+          </p:nvSpPr>
+          <p:spPr>
+            <a:xfrm flipH="false" flipV="false" rot="0">
+              <a:off x="0" y="0"/>
+              <a:ext cx="49982" cy="4826627"/>
+            </a:xfrm>
+            <a:custGeom>
+              <a:avLst/>
+              <a:gdLst/>
+              <a:ahLst/>
+              <a:cxnLst/>
+              <a:rect r="r" b="b" t="t" l="l"/>
+              <a:pathLst>
+                <a:path h="4826627" w="49982">
+                  <a:moveTo>
+                    <a:pt x="0" y="0"/>
+                  </a:moveTo>
+                  <a:lnTo>
+                    <a:pt x="49982" y="0"/>
+                  </a:lnTo>
+                  <a:lnTo>
+                    <a:pt x="49982" y="4826627"/>
+                  </a:lnTo>
+                  <a:lnTo>
+                    <a:pt x="0" y="4826627"/>
+                  </a:lnTo>
+                  <a:close/>
+                </a:path>
+              </a:pathLst>
+            </a:custGeom>
+            <a:solidFill>
+              <a:srgbClr val="F6F5F2"/>
+            </a:solidFill>
+          </p:spPr>
+        </p:sp>
+        <p:sp>
+          <p:nvSpPr>
+            <p:cNvPr name="TextBox 11" id="11"/>
+            <p:cNvSpPr txBox="true"/>
+            <p:nvPr/>
+          </p:nvSpPr>
+          <p:spPr>
+            <a:xfrm>
+              <a:off x="0" y="-47625"/>
+              <a:ext cx="49982" cy="4874252"/>
+            </a:xfrm>
+            <a:prstGeom prst="rect">
+              <a:avLst/>
+            </a:prstGeom>
+          </p:spPr>
+          <p:txBody>
+            <a:bodyPr anchor="ctr" rtlCol="false" tIns="50800" lIns="50800" bIns="50800" rIns="50800"/>
+            <a:lstStyle/>
+            <a:p>
+              <a:pPr algn="ctr">
+                <a:lnSpc>
+                  <a:spcPts val="3359"/>
+                </a:lnSpc>
+              </a:pPr>
+            </a:p>
+          </p:txBody>
+        </p:sp>
+      </p:grpSp>
+    </p:spTree>
+  </p:cSld>
+  <p:clrMapOvr>
+    <a:masterClrMapping/>
+  </p:clrMapOvr>
+</p:sld>
+</file>
+
+<file path=ppt/slides/slide11.xml><?xml version="1.0" encoding="utf-8"?>
+<p:sld xmlns:p="http://schemas.openxmlformats.org/presentationml/2006/main" xmlns:a="http://schemas.openxmlformats.org/drawingml/2006/main" xmlns:r="http://schemas.openxmlformats.org/officeDocument/2006/relationships">
+  <p:cSld>
+    <p:bg>
+      <p:bgPr>
+        <a:solidFill>
+          <a:srgbClr val="353533"/>
+        </a:solidFill>
+      </p:bgPr>
+    </p:bg>
+    <p:spTree>
+      <p:nvGrpSpPr>
+        <p:cNvPr id="1" name=""/>
+        <p:cNvGrpSpPr/>
+        <p:nvPr/>
+      </p:nvGrpSpPr>
+      <p:grpSpPr>
+        <a:xfrm>
+          <a:off x="0" y="0"/>
+          <a:ext cx="0" cy="0"/>
+          <a:chOff x="0" y="0"/>
+          <a:chExt cx="0" cy="0"/>
+        </a:xfrm>
+      </p:grpSpPr>
+      <p:grpSp>
+        <p:nvGrpSpPr>
+          <p:cNvPr name="Group 2" id="2"/>
+          <p:cNvGrpSpPr/>
+          <p:nvPr/>
+        </p:nvGrpSpPr>
+        <p:grpSpPr>
+          <a:xfrm rot="0">
+            <a:off x="10734675" y="666750"/>
+            <a:ext cx="6886575" cy="8966200"/>
+            <a:chOff x="0" y="0"/>
+            <a:chExt cx="1546294" cy="2013248"/>
+          </a:xfrm>
+        </p:grpSpPr>
+        <p:sp>
+          <p:nvSpPr>
+            <p:cNvPr name="Freeform 3" id="3"/>
+            <p:cNvSpPr/>
+            <p:nvPr/>
+          </p:nvSpPr>
+          <p:spPr>
+            <a:xfrm flipH="false" flipV="false" rot="0">
+              <a:off x="0" y="0"/>
+              <a:ext cx="1546294" cy="2013248"/>
+            </a:xfrm>
+            <a:custGeom>
+              <a:avLst/>
+              <a:gdLst/>
+              <a:ahLst/>
+              <a:cxnLst/>
+              <a:rect r="r" b="b" t="t" l="l"/>
+              <a:pathLst>
+                <a:path h="2013248" w="1546294">
+                  <a:moveTo>
+                    <a:pt x="0" y="0"/>
+                  </a:moveTo>
+                  <a:lnTo>
+                    <a:pt x="1546294" y="0"/>
+                  </a:lnTo>
+                  <a:lnTo>
+                    <a:pt x="1546294" y="2013248"/>
+                  </a:lnTo>
+                  <a:lnTo>
+                    <a:pt x="0" y="2013248"/>
+                  </a:lnTo>
+                  <a:close/>
+                </a:path>
+              </a:pathLst>
+            </a:custGeom>
+            <a:blipFill>
+              <a:blip r:embed="rId2"/>
+              <a:stretch>
+                <a:fillRect l="-41159" t="0" r="6275" b="59627"/>
+              </a:stretch>
+            </a:blipFill>
+          </p:spPr>
+        </p:sp>
+      </p:grpSp>
+      <p:grpSp>
+        <p:nvGrpSpPr>
+          <p:cNvPr name="Group 4" id="4"/>
+          <p:cNvGrpSpPr/>
+          <p:nvPr/>
+        </p:nvGrpSpPr>
+        <p:grpSpPr>
+          <a:xfrm rot="0">
+            <a:off x="10734675" y="666750"/>
+            <a:ext cx="6886575" cy="8966200"/>
+            <a:chOff x="0" y="0"/>
+            <a:chExt cx="1813748" cy="2361468"/>
+          </a:xfrm>
+        </p:grpSpPr>
+        <p:sp>
+          <p:nvSpPr>
+            <p:cNvPr name="Freeform 5" id="5"/>
+            <p:cNvSpPr/>
+            <p:nvPr/>
+          </p:nvSpPr>
+          <p:spPr>
+            <a:xfrm flipH="false" flipV="false" rot="0">
+              <a:off x="0" y="0"/>
+              <a:ext cx="1813748" cy="2361468"/>
+            </a:xfrm>
+            <a:custGeom>
+              <a:avLst/>
+              <a:gdLst/>
+              <a:ahLst/>
+              <a:cxnLst/>
+              <a:rect r="r" b="b" t="t" l="l"/>
+              <a:pathLst>
+                <a:path h="2361468" w="1813748">
+                  <a:moveTo>
+                    <a:pt x="0" y="0"/>
+                  </a:moveTo>
+                  <a:lnTo>
+                    <a:pt x="1813748" y="0"/>
+                  </a:lnTo>
+                  <a:lnTo>
+                    <a:pt x="1813748" y="2361468"/>
+                  </a:lnTo>
+                  <a:lnTo>
+                    <a:pt x="0" y="2361468"/>
+                  </a:lnTo>
+                  <a:close/>
+                </a:path>
+              </a:pathLst>
+            </a:custGeom>
+            <a:solidFill>
+              <a:srgbClr val="F6F5F2"/>
+            </a:solidFill>
+          </p:spPr>
+        </p:sp>
+        <p:sp>
+          <p:nvSpPr>
+            <p:cNvPr name="TextBox 6" id="6"/>
+            <p:cNvSpPr txBox="true"/>
+            <p:nvPr/>
+          </p:nvSpPr>
+          <p:spPr>
+            <a:xfrm>
+              <a:off x="0" y="-47625"/>
+              <a:ext cx="1813748" cy="2409093"/>
+            </a:xfrm>
+            <a:prstGeom prst="rect">
+              <a:avLst/>
+            </a:prstGeom>
+          </p:spPr>
+          <p:txBody>
+            <a:bodyPr anchor="ctr" rtlCol="false" tIns="50800" lIns="50800" bIns="50800" rIns="50800"/>
+            <a:lstStyle/>
+            <a:p>
+              <a:pPr algn="ctr">
+                <a:lnSpc>
+                  <a:spcPts val="2940"/>
+                </a:lnSpc>
+              </a:pPr>
+            </a:p>
+          </p:txBody>
+        </p:sp>
+      </p:grpSp>
+      <p:sp>
+        <p:nvSpPr>
+          <p:cNvPr name="TextBox 7" id="7"/>
+          <p:cNvSpPr txBox="true"/>
+          <p:nvPr/>
+        </p:nvSpPr>
+        <p:spPr>
+          <a:xfrm rot="0">
+            <a:off x="666750" y="771525"/>
+            <a:ext cx="8946860" cy="3150236"/>
+          </a:xfrm>
+          <a:prstGeom prst="rect">
+            <a:avLst/>
+          </a:prstGeom>
+        </p:spPr>
+        <p:txBody>
+          <a:bodyPr anchor="t" rtlCol="false" tIns="0" lIns="0" bIns="0" rIns="0">
+            <a:spAutoFit/>
+          </a:bodyPr>
+          <a:lstStyle/>
+          <a:p>
+            <a:pPr algn="l" marL="0" indent="0" lvl="0">
+              <a:lnSpc>
+                <a:spcPts val="8000"/>
+              </a:lnSpc>
+              <a:spcBef>
+                <a:spcPct val="0"/>
+              </a:spcBef>
+            </a:pPr>
+            <a:r>
+              <a:rPr lang="en-US" b="true" sz="8000" strike="noStrike" u="none">
+                <a:solidFill>
+                  <a:srgbClr val="F6F5F2"/>
+                </a:solidFill>
+                <a:latin typeface="Helios Extended Bold"/>
+                <a:ea typeface="Helios Extended Bold"/>
+                <a:cs typeface="Helios Extended Bold"/>
+                <a:sym typeface="Helios Extended Bold"/>
+              </a:rPr>
+              <a:t>O Rio já tem os dados. Falta </a:t>
+            </a:r>
+            <a:r>
+              <a:rPr lang="en-US" b="true" sz="8000" strike="noStrike" u="sng">
+                <a:solidFill>
+                  <a:srgbClr val="FFBD59"/>
+                </a:solidFill>
+                <a:latin typeface="Helios Extended Bold"/>
+                <a:ea typeface="Helios Extended Bold"/>
+                <a:cs typeface="Helios Extended Bold"/>
+                <a:sym typeface="Helios Extended Bold"/>
+              </a:rPr>
+              <a:t>acelerar</a:t>
+            </a:r>
+            <a:r>
+              <a:rPr lang="en-US" b="true" sz="8000" strike="noStrike" u="none">
+                <a:solidFill>
+                  <a:srgbClr val="F6F5F2"/>
+                </a:solidFill>
+                <a:latin typeface="Helios Extended Bold"/>
+                <a:ea typeface="Helios Extended Bold"/>
+                <a:cs typeface="Helios Extended Bold"/>
+                <a:sym typeface="Helios Extended Bold"/>
+              </a:rPr>
+              <a:t>.</a:t>
+            </a:r>
+          </a:p>
+        </p:txBody>
+      </p:sp>
+      <p:grpSp>
+        <p:nvGrpSpPr>
+          <p:cNvPr name="Group 8" id="8"/>
+          <p:cNvGrpSpPr/>
+          <p:nvPr/>
+        </p:nvGrpSpPr>
+        <p:grpSpPr>
+          <a:xfrm rot="0">
+            <a:off x="666750" y="5143500"/>
+            <a:ext cx="5448300" cy="4399451"/>
+            <a:chOff x="0" y="0"/>
+            <a:chExt cx="7264400" cy="5865935"/>
+          </a:xfrm>
+        </p:grpSpPr>
+        <p:sp>
+          <p:nvSpPr>
+            <p:cNvPr name="TextBox 9" id="9"/>
+            <p:cNvSpPr txBox="true"/>
+            <p:nvPr/>
+          </p:nvSpPr>
+          <p:spPr>
+            <a:xfrm rot="0">
+              <a:off x="0" y="3018986"/>
+              <a:ext cx="7264400" cy="462216"/>
+            </a:xfrm>
+            <a:prstGeom prst="rect">
+              <a:avLst/>
+            </a:prstGeom>
+          </p:spPr>
+          <p:txBody>
+            <a:bodyPr anchor="t" rtlCol="false" tIns="0" lIns="0" bIns="0" rIns="0">
+              <a:spAutoFit/>
+            </a:bodyPr>
+            <a:lstStyle/>
+            <a:p>
+              <a:pPr algn="l" marL="0" indent="0" lvl="0">
+                <a:lnSpc>
+                  <a:spcPts val="2939"/>
+                </a:lnSpc>
+              </a:pPr>
+              <a:r>
+                <a:rPr lang="en-US" sz="2099">
+                  <a:solidFill>
+                    <a:srgbClr val="F6F5F2"/>
+                  </a:solidFill>
+                  <a:latin typeface="Fira Sans Light"/>
+                  <a:ea typeface="Fira Sans Light"/>
+                  <a:cs typeface="Fira Sans Light"/>
+                  <a:sym typeface="Fira Sans Light"/>
+                </a:rPr>
+                <a:t>https://compstat.vercel.app/</a:t>
+              </a:r>
+            </a:p>
+          </p:txBody>
+        </p:sp>
+        <p:sp>
+          <p:nvSpPr>
+            <p:cNvPr name="TextBox 10" id="10"/>
+            <p:cNvSpPr txBox="true"/>
+            <p:nvPr/>
+          </p:nvSpPr>
+          <p:spPr>
+            <a:xfrm rot="0">
+              <a:off x="0" y="2321968"/>
+              <a:ext cx="7264400" cy="578697"/>
+            </a:xfrm>
+            <a:prstGeom prst="rect">
+              <a:avLst/>
+            </a:prstGeom>
+          </p:spPr>
+          <p:txBody>
+            <a:bodyPr anchor="t" rtlCol="false" tIns="0" lIns="0" bIns="0" rIns="0">
+              <a:spAutoFit/>
+            </a:bodyPr>
+            <a:lstStyle/>
+            <a:p>
+              <a:pPr algn="l" marL="0" indent="0" lvl="0">
+                <a:lnSpc>
+                  <a:spcPts val="3640"/>
+                </a:lnSpc>
+              </a:pPr>
+              <a:r>
+                <a:rPr lang="en-US" b="true" sz="2600">
+                  <a:solidFill>
+                    <a:srgbClr val="F6F5F2"/>
+                  </a:solidFill>
+                  <a:latin typeface="Fira Sans Bold"/>
+                  <a:ea typeface="Fira Sans Bold"/>
+                  <a:cs typeface="Fira Sans Bold"/>
+                  <a:sym typeface="Fira Sans Bold"/>
+                </a:rPr>
+                <a:t>WEBSITE</a:t>
+              </a:r>
+            </a:p>
+          </p:txBody>
+        </p:sp>
+        <p:sp>
+          <p:nvSpPr>
+            <p:cNvPr name="TextBox 11" id="11"/>
+            <p:cNvSpPr txBox="true"/>
+            <p:nvPr/>
+          </p:nvSpPr>
+          <p:spPr>
+            <a:xfrm rot="0">
+              <a:off x="0" y="639868"/>
+              <a:ext cx="7264400" cy="462216"/>
+            </a:xfrm>
+            <a:prstGeom prst="rect">
+              <a:avLst/>
+            </a:prstGeom>
+          </p:spPr>
+          <p:txBody>
+            <a:bodyPr anchor="t" rtlCol="false" tIns="0" lIns="0" bIns="0" rIns="0">
+              <a:spAutoFit/>
+            </a:bodyPr>
+            <a:lstStyle/>
+            <a:p>
+              <a:pPr algn="l" marL="0" indent="0" lvl="0">
+                <a:lnSpc>
+                  <a:spcPts val="2939"/>
+                </a:lnSpc>
+                <a:spcBef>
+                  <a:spcPct val="0"/>
+                </a:spcBef>
+              </a:pPr>
+              <a:r>
+                <a:rPr lang="en-US" sz="2099">
+                  <a:solidFill>
+                    <a:srgbClr val="F6F5F2"/>
+                  </a:solidFill>
+                  <a:latin typeface="Fira Sans Light"/>
+                  <a:ea typeface="Fira Sans Light"/>
+                  <a:cs typeface="Fira Sans Light"/>
+                  <a:sym typeface="Fira Sans Light"/>
+                </a:rPr>
+                <a:t>+55 21 99756-6769</a:t>
+              </a:r>
+            </a:p>
+          </p:txBody>
+        </p:sp>
+        <p:sp>
+          <p:nvSpPr>
+            <p:cNvPr name="TextBox 12" id="12"/>
+            <p:cNvSpPr txBox="true"/>
+            <p:nvPr/>
+          </p:nvSpPr>
+          <p:spPr>
+            <a:xfrm rot="0">
+              <a:off x="0" y="-57150"/>
+              <a:ext cx="7264400" cy="578697"/>
+            </a:xfrm>
+            <a:prstGeom prst="rect">
+              <a:avLst/>
+            </a:prstGeom>
+          </p:spPr>
+          <p:txBody>
+            <a:bodyPr anchor="t" rtlCol="false" tIns="0" lIns="0" bIns="0" rIns="0">
+              <a:spAutoFit/>
+            </a:bodyPr>
+            <a:lstStyle/>
+            <a:p>
+              <a:pPr algn="l" marL="0" indent="0" lvl="0">
+                <a:lnSpc>
+                  <a:spcPts val="3640"/>
+                </a:lnSpc>
+              </a:pPr>
+              <a:r>
+                <a:rPr lang="en-US" b="true" sz="2600">
+                  <a:solidFill>
+                    <a:srgbClr val="F6F5F2"/>
+                  </a:solidFill>
+                  <a:latin typeface="Fira Sans Bold"/>
+                  <a:ea typeface="Fira Sans Bold"/>
+                  <a:cs typeface="Fira Sans Bold"/>
+                  <a:sym typeface="Fira Sans Bold"/>
+                </a:rPr>
+                <a:t>TELEFONE</a:t>
+              </a:r>
+            </a:p>
+          </p:txBody>
+        </p:sp>
+        <p:sp>
+          <p:nvSpPr>
+            <p:cNvPr name="TextBox 13" id="13"/>
+            <p:cNvSpPr txBox="true"/>
+            <p:nvPr/>
+          </p:nvSpPr>
+          <p:spPr>
+            <a:xfrm rot="0">
+              <a:off x="0" y="5403719"/>
+              <a:ext cx="7264400" cy="462216"/>
+            </a:xfrm>
+            <a:prstGeom prst="rect">
+              <a:avLst/>
+            </a:prstGeom>
+          </p:spPr>
+          <p:txBody>
+            <a:bodyPr anchor="t" rtlCol="false" tIns="0" lIns="0" bIns="0" rIns="0">
+              <a:spAutoFit/>
+            </a:bodyPr>
+            <a:lstStyle/>
+            <a:p>
+              <a:pPr algn="l" marL="0" indent="0" lvl="0">
+                <a:lnSpc>
+                  <a:spcPts val="2939"/>
+                </a:lnSpc>
+                <a:spcBef>
+                  <a:spcPct val="0"/>
+                </a:spcBef>
+              </a:pPr>
+              <a:r>
+                <a:rPr lang="en-US" sz="2099">
+                  <a:solidFill>
+                    <a:srgbClr val="F6F5F2"/>
+                  </a:solidFill>
+                  <a:latin typeface="Fira Sans Light"/>
+                  <a:ea typeface="Fira Sans Light"/>
+                  <a:cs typeface="Fira Sans Light"/>
+                  <a:sym typeface="Fira Sans Light"/>
+                </a:rPr>
+                <a:t>leandromaveiro@hotmail.com</a:t>
+              </a:r>
+            </a:p>
+          </p:txBody>
+        </p:sp>
+        <p:sp>
+          <p:nvSpPr>
+            <p:cNvPr name="TextBox 14" id="14"/>
+            <p:cNvSpPr txBox="true"/>
+            <p:nvPr/>
+          </p:nvSpPr>
+          <p:spPr>
+            <a:xfrm rot="0">
+              <a:off x="0" y="4706701"/>
+              <a:ext cx="7264400" cy="578697"/>
+            </a:xfrm>
+            <a:prstGeom prst="rect">
+              <a:avLst/>
+            </a:prstGeom>
+          </p:spPr>
+          <p:txBody>
+            <a:bodyPr anchor="t" rtlCol="false" tIns="0" lIns="0" bIns="0" rIns="0">
+              <a:spAutoFit/>
+            </a:bodyPr>
+            <a:lstStyle/>
+            <a:p>
+              <a:pPr algn="l" marL="0" indent="0" lvl="0">
+                <a:lnSpc>
+                  <a:spcPts val="3640"/>
+                </a:lnSpc>
+              </a:pPr>
+              <a:r>
+                <a:rPr lang="en-US" b="true" sz="2600">
+                  <a:solidFill>
+                    <a:srgbClr val="F6F5F2"/>
+                  </a:solidFill>
+                  <a:latin typeface="Fira Sans Bold"/>
+                  <a:ea typeface="Fira Sans Bold"/>
+                  <a:cs typeface="Fira Sans Bold"/>
+                  <a:sym typeface="Fira Sans Bold"/>
+                </a:rPr>
+                <a:t>EMAIL</a:t>
+              </a:r>
+            </a:p>
+          </p:txBody>
+        </p:sp>
+      </p:grpSp>
+      <p:pic>
+        <p:nvPicPr>
+          <p:cNvPr name="Picture 15" id="15"/>
+          <p:cNvPicPr>
+            <a:picLocks noChangeAspect="true"/>
+          </p:cNvPicPr>
+          <p:nvPr/>
+        </p:nvPicPr>
+        <p:blipFill>
+          <a:blip r:embed="rId3"/>
+          <a:stretch>
+            <a:fillRect/>
+          </a:stretch>
+        </p:blipFill>
+        <p:spPr>
+          <a:xfrm rot="0">
+            <a:off x="11393292" y="2365180"/>
+            <a:ext cx="5569339" cy="5569339"/>
+          </a:xfrm>
+          <a:prstGeom prst="rect">
+            <a:avLst/>
+          </a:prstGeom>
+        </p:spPr>
+      </p:pic>
+    </p:spTree>
+  </p:cSld>
+  <p:clrMapOvr>
+    <a:masterClrMapping/>
+  </p:clrMapOvr>
+</p:sld>
+</file>
+
 <file path=ppt/slides/slide2.xml><?xml version="1.0" encoding="utf-8"?>
 <p:sld xmlns:p="http://schemas.openxmlformats.org/presentationml/2006/main" xmlns:a="http://schemas.openxmlformats.org/drawingml/2006/main">
   <p:cSld>
@@ -4719,7 +5610,7 @@
         </p:nvGrpSpPr>
         <p:grpSpPr>
           <a:xfrm rot="0">
-            <a:off x="9467850" y="666750"/>
+            <a:off x="9778855" y="666750"/>
             <a:ext cx="7958914" cy="8953500"/>
             <a:chOff x="0" y="0"/>
             <a:chExt cx="2079925" cy="2339842"/>
@@ -5351,6 +6242,552 @@
 </file>
 
 <file path=ppt/slides/slide7.xml><?xml version="1.0" encoding="utf-8"?>
+<p:sld xmlns:p="http://schemas.openxmlformats.org/presentationml/2006/main" xmlns:a="http://schemas.openxmlformats.org/drawingml/2006/main" xmlns:r="http://schemas.openxmlformats.org/officeDocument/2006/relationships">
+  <p:cSld>
+    <p:bg>
+      <p:bgPr>
+        <a:solidFill>
+          <a:srgbClr val="353533"/>
+        </a:solidFill>
+      </p:bgPr>
+    </p:bg>
+    <p:spTree>
+      <p:nvGrpSpPr>
+        <p:cNvPr id="1" name=""/>
+        <p:cNvGrpSpPr/>
+        <p:nvPr/>
+      </p:nvGrpSpPr>
+      <p:grpSpPr>
+        <a:xfrm>
+          <a:off x="0" y="0"/>
+          <a:ext cx="0" cy="0"/>
+          <a:chOff x="0" y="0"/>
+          <a:chExt cx="0" cy="0"/>
+        </a:xfrm>
+      </p:grpSpPr>
+      <p:sp>
+        <p:nvSpPr>
+          <p:cNvPr name="AutoShape 2" id="2"/>
+          <p:cNvSpPr/>
+          <p:nvPr/>
+        </p:nvSpPr>
+        <p:spPr>
+          <a:xfrm rot="0">
+            <a:off x="12172950" y="0"/>
+            <a:ext cx="6115050" cy="10287000"/>
+          </a:xfrm>
+          <a:prstGeom prst="rect">
+            <a:avLst/>
+          </a:prstGeom>
+          <a:solidFill>
+            <a:srgbClr val="F6F5F2"/>
+          </a:solidFill>
+        </p:spPr>
+      </p:sp>
+      <p:grpSp>
+        <p:nvGrpSpPr>
+          <p:cNvPr name="Group 3" id="3"/>
+          <p:cNvGrpSpPr/>
+          <p:nvPr/>
+        </p:nvGrpSpPr>
+        <p:grpSpPr>
+          <a:xfrm rot="-10800000">
+            <a:off x="0" y="0"/>
+            <a:ext cx="189775" cy="10287000"/>
+            <a:chOff x="0" y="0"/>
+            <a:chExt cx="49982" cy="2709333"/>
+          </a:xfrm>
+        </p:grpSpPr>
+        <p:sp>
+          <p:nvSpPr>
+            <p:cNvPr name="Freeform 4" id="4"/>
+            <p:cNvSpPr/>
+            <p:nvPr/>
+          </p:nvSpPr>
+          <p:spPr>
+            <a:xfrm flipH="false" flipV="false" rot="0">
+              <a:off x="0" y="0"/>
+              <a:ext cx="49982" cy="2709333"/>
+            </a:xfrm>
+            <a:custGeom>
+              <a:avLst/>
+              <a:gdLst/>
+              <a:ahLst/>
+              <a:cxnLst/>
+              <a:rect r="r" b="b" t="t" l="l"/>
+              <a:pathLst>
+                <a:path h="2709333" w="49982">
+                  <a:moveTo>
+                    <a:pt x="0" y="0"/>
+                  </a:moveTo>
+                  <a:lnTo>
+                    <a:pt x="49982" y="0"/>
+                  </a:lnTo>
+                  <a:lnTo>
+                    <a:pt x="49982" y="2709333"/>
+                  </a:lnTo>
+                  <a:lnTo>
+                    <a:pt x="0" y="2709333"/>
+                  </a:lnTo>
+                  <a:close/>
+                </a:path>
+              </a:pathLst>
+            </a:custGeom>
+            <a:solidFill>
+              <a:srgbClr val="F6F5F2"/>
+            </a:solidFill>
+          </p:spPr>
+        </p:sp>
+        <p:sp>
+          <p:nvSpPr>
+            <p:cNvPr name="TextBox 5" id="5"/>
+            <p:cNvSpPr txBox="true"/>
+            <p:nvPr/>
+          </p:nvSpPr>
+          <p:spPr>
+            <a:xfrm>
+              <a:off x="0" y="-47625"/>
+              <a:ext cx="49982" cy="2756958"/>
+            </a:xfrm>
+            <a:prstGeom prst="rect">
+              <a:avLst/>
+            </a:prstGeom>
+          </p:spPr>
+          <p:txBody>
+            <a:bodyPr anchor="ctr" rtlCol="false" tIns="50800" lIns="50800" bIns="50800" rIns="50800"/>
+            <a:lstStyle/>
+            <a:p>
+              <a:pPr algn="ctr" marL="0" indent="0" lvl="0">
+                <a:lnSpc>
+                  <a:spcPts val="3359"/>
+                </a:lnSpc>
+                <a:spcBef>
+                  <a:spcPct val="0"/>
+                </a:spcBef>
+              </a:pPr>
+            </a:p>
+          </p:txBody>
+        </p:sp>
+      </p:grpSp>
+      <p:sp>
+        <p:nvSpPr>
+          <p:cNvPr name="Freeform 6" id="6"/>
+          <p:cNvSpPr/>
+          <p:nvPr/>
+        </p:nvSpPr>
+        <p:spPr>
+          <a:xfrm flipH="false" flipV="false" rot="0">
+            <a:off x="5790269" y="3024795"/>
+            <a:ext cx="11832554" cy="6922044"/>
+          </a:xfrm>
+          <a:custGeom>
+            <a:avLst/>
+            <a:gdLst/>
+            <a:ahLst/>
+            <a:cxnLst/>
+            <a:rect r="r" b="b" t="t" l="l"/>
+            <a:pathLst>
+              <a:path h="6922044" w="11832554">
+                <a:moveTo>
+                  <a:pt x="0" y="0"/>
+                </a:moveTo>
+                <a:lnTo>
+                  <a:pt x="11832553" y="0"/>
+                </a:lnTo>
+                <a:lnTo>
+                  <a:pt x="11832553" y="6922044"/>
+                </a:lnTo>
+                <a:lnTo>
+                  <a:pt x="0" y="6922044"/>
+                </a:lnTo>
+                <a:lnTo>
+                  <a:pt x="0" y="0"/>
+                </a:lnTo>
+                <a:close/>
+              </a:path>
+            </a:pathLst>
+          </a:custGeom>
+          <a:blipFill>
+            <a:blip r:embed="rId2"/>
+            <a:stretch>
+              <a:fillRect l="0" t="0" r="0" b="0"/>
+            </a:stretch>
+          </a:blipFill>
+        </p:spPr>
+      </p:sp>
+      <p:grpSp>
+        <p:nvGrpSpPr>
+          <p:cNvPr name="Group 7" id="7"/>
+          <p:cNvGrpSpPr/>
+          <p:nvPr/>
+        </p:nvGrpSpPr>
+        <p:grpSpPr>
+          <a:xfrm rot="0">
+            <a:off x="666750" y="666750"/>
+            <a:ext cx="8324850" cy="5667375"/>
+            <a:chOff x="0" y="0"/>
+            <a:chExt cx="11099800" cy="7556500"/>
+          </a:xfrm>
+        </p:grpSpPr>
+        <p:sp>
+          <p:nvSpPr>
+            <p:cNvPr name="TextBox 8" id="8"/>
+            <p:cNvSpPr txBox="true"/>
+            <p:nvPr/>
+          </p:nvSpPr>
+          <p:spPr>
+            <a:xfrm rot="0">
+              <a:off x="0" y="7062682"/>
+              <a:ext cx="9182100" cy="493818"/>
+            </a:xfrm>
+            <a:prstGeom prst="rect">
+              <a:avLst/>
+            </a:prstGeom>
+          </p:spPr>
+          <p:txBody>
+            <a:bodyPr anchor="t" rtlCol="false" tIns="0" lIns="0" bIns="0" rIns="0">
+              <a:spAutoFit/>
+            </a:bodyPr>
+            <a:lstStyle/>
+            <a:p>
+              <a:pPr algn="l" marL="0" indent="0" lvl="0">
+                <a:lnSpc>
+                  <a:spcPts val="3079"/>
+                </a:lnSpc>
+                <a:spcBef>
+                  <a:spcPct val="0"/>
+                </a:spcBef>
+              </a:pPr>
+            </a:p>
+          </p:txBody>
+        </p:sp>
+        <p:sp>
+          <p:nvSpPr>
+            <p:cNvPr name="TextBox 9" id="9"/>
+            <p:cNvSpPr txBox="true"/>
+            <p:nvPr/>
+          </p:nvSpPr>
+          <p:spPr>
+            <a:xfrm rot="0">
+              <a:off x="0" y="28575"/>
+              <a:ext cx="11099800" cy="3078696"/>
+            </a:xfrm>
+            <a:prstGeom prst="rect">
+              <a:avLst/>
+            </a:prstGeom>
+          </p:spPr>
+          <p:txBody>
+            <a:bodyPr anchor="t" rtlCol="false" tIns="0" lIns="0" bIns="0" rIns="0">
+              <a:spAutoFit/>
+            </a:bodyPr>
+            <a:lstStyle/>
+            <a:p>
+              <a:pPr algn="l" marL="0" indent="0" lvl="0">
+                <a:lnSpc>
+                  <a:spcPts val="8800"/>
+                </a:lnSpc>
+                <a:spcBef>
+                  <a:spcPct val="0"/>
+                </a:spcBef>
+              </a:pPr>
+              <a:r>
+                <a:rPr lang="en-US" sz="8000" strike="noStrike" u="none">
+                  <a:solidFill>
+                    <a:srgbClr val="F6F5F2"/>
+                  </a:solidFill>
+                  <a:latin typeface="Helios Extended"/>
+                  <a:ea typeface="Helios Extended"/>
+                  <a:cs typeface="Helios Extended"/>
+                  <a:sym typeface="Helios Extended"/>
+                </a:rPr>
+                <a:t>Da mancha ao plano de ação</a:t>
+              </a:r>
+            </a:p>
+          </p:txBody>
+        </p:sp>
+      </p:grpSp>
+    </p:spTree>
+  </p:cSld>
+  <p:clrMapOvr>
+    <a:masterClrMapping/>
+  </p:clrMapOvr>
+</p:sld>
+</file>
+
+<file path=ppt/slides/slide8.xml><?xml version="1.0" encoding="utf-8"?>
+<p:sld xmlns:p="http://schemas.openxmlformats.org/presentationml/2006/main" xmlns:a="http://schemas.openxmlformats.org/drawingml/2006/main" xmlns:r="http://schemas.openxmlformats.org/officeDocument/2006/relationships">
+  <p:cSld>
+    <p:bg>
+      <p:bgPr>
+        <a:solidFill>
+          <a:srgbClr val="353533"/>
+        </a:solidFill>
+      </p:bgPr>
+    </p:bg>
+    <p:spTree>
+      <p:nvGrpSpPr>
+        <p:cNvPr id="1" name=""/>
+        <p:cNvGrpSpPr/>
+        <p:nvPr/>
+      </p:nvGrpSpPr>
+      <p:grpSpPr>
+        <a:xfrm>
+          <a:off x="0" y="0"/>
+          <a:ext cx="0" cy="0"/>
+          <a:chOff x="0" y="0"/>
+          <a:chExt cx="0" cy="0"/>
+        </a:xfrm>
+      </p:grpSpPr>
+      <p:sp>
+        <p:nvSpPr>
+          <p:cNvPr name="AutoShape 2" id="2"/>
+          <p:cNvSpPr/>
+          <p:nvPr/>
+        </p:nvSpPr>
+        <p:spPr>
+          <a:xfrm rot="0">
+            <a:off x="12172950" y="0"/>
+            <a:ext cx="6115050" cy="10287000"/>
+          </a:xfrm>
+          <a:prstGeom prst="rect">
+            <a:avLst/>
+          </a:prstGeom>
+          <a:solidFill>
+            <a:srgbClr val="F6F5F2"/>
+          </a:solidFill>
+        </p:spPr>
+      </p:sp>
+      <p:grpSp>
+        <p:nvGrpSpPr>
+          <p:cNvPr name="Group 3" id="3"/>
+          <p:cNvGrpSpPr/>
+          <p:nvPr/>
+        </p:nvGrpSpPr>
+        <p:grpSpPr>
+          <a:xfrm rot="-10800000">
+            <a:off x="0" y="0"/>
+            <a:ext cx="189775" cy="10287000"/>
+            <a:chOff x="0" y="0"/>
+            <a:chExt cx="49982" cy="2709333"/>
+          </a:xfrm>
+        </p:grpSpPr>
+        <p:sp>
+          <p:nvSpPr>
+            <p:cNvPr name="Freeform 4" id="4"/>
+            <p:cNvSpPr/>
+            <p:nvPr/>
+          </p:nvSpPr>
+          <p:spPr>
+            <a:xfrm flipH="false" flipV="false" rot="0">
+              <a:off x="0" y="0"/>
+              <a:ext cx="49982" cy="2709333"/>
+            </a:xfrm>
+            <a:custGeom>
+              <a:avLst/>
+              <a:gdLst/>
+              <a:ahLst/>
+              <a:cxnLst/>
+              <a:rect r="r" b="b" t="t" l="l"/>
+              <a:pathLst>
+                <a:path h="2709333" w="49982">
+                  <a:moveTo>
+                    <a:pt x="0" y="0"/>
+                  </a:moveTo>
+                  <a:lnTo>
+                    <a:pt x="49982" y="0"/>
+                  </a:lnTo>
+                  <a:lnTo>
+                    <a:pt x="49982" y="2709333"/>
+                  </a:lnTo>
+                  <a:lnTo>
+                    <a:pt x="0" y="2709333"/>
+                  </a:lnTo>
+                  <a:close/>
+                </a:path>
+              </a:pathLst>
+            </a:custGeom>
+            <a:solidFill>
+              <a:srgbClr val="F6F5F2"/>
+            </a:solidFill>
+          </p:spPr>
+        </p:sp>
+        <p:sp>
+          <p:nvSpPr>
+            <p:cNvPr name="TextBox 5" id="5"/>
+            <p:cNvSpPr txBox="true"/>
+            <p:nvPr/>
+          </p:nvSpPr>
+          <p:spPr>
+            <a:xfrm>
+              <a:off x="0" y="-47625"/>
+              <a:ext cx="49982" cy="2756958"/>
+            </a:xfrm>
+            <a:prstGeom prst="rect">
+              <a:avLst/>
+            </a:prstGeom>
+          </p:spPr>
+          <p:txBody>
+            <a:bodyPr anchor="ctr" rtlCol="false" tIns="50800" lIns="50800" bIns="50800" rIns="50800"/>
+            <a:lstStyle/>
+            <a:p>
+              <a:pPr algn="ctr" marL="0" indent="0" lvl="0">
+                <a:lnSpc>
+                  <a:spcPts val="3359"/>
+                </a:lnSpc>
+                <a:spcBef>
+                  <a:spcPct val="0"/>
+                </a:spcBef>
+              </a:pPr>
+            </a:p>
+          </p:txBody>
+        </p:sp>
+      </p:grpSp>
+      <p:sp>
+        <p:nvSpPr>
+          <p:cNvPr name="Freeform 6" id="6"/>
+          <p:cNvSpPr/>
+          <p:nvPr/>
+        </p:nvSpPr>
+        <p:spPr>
+          <a:xfrm flipH="false" flipV="false" rot="0">
+            <a:off x="5490872" y="3071088"/>
+            <a:ext cx="11768428" cy="7000601"/>
+          </a:xfrm>
+          <a:custGeom>
+            <a:avLst/>
+            <a:gdLst/>
+            <a:ahLst/>
+            <a:cxnLst/>
+            <a:rect r="r" b="b" t="t" l="l"/>
+            <a:pathLst>
+              <a:path h="7000601" w="11768428">
+                <a:moveTo>
+                  <a:pt x="0" y="0"/>
+                </a:moveTo>
+                <a:lnTo>
+                  <a:pt x="11768428" y="0"/>
+                </a:lnTo>
+                <a:lnTo>
+                  <a:pt x="11768428" y="7000601"/>
+                </a:lnTo>
+                <a:lnTo>
+                  <a:pt x="0" y="7000601"/>
+                </a:lnTo>
+                <a:lnTo>
+                  <a:pt x="0" y="0"/>
+                </a:lnTo>
+                <a:close/>
+              </a:path>
+            </a:pathLst>
+          </a:custGeom>
+          <a:blipFill>
+            <a:blip r:embed="rId2"/>
+            <a:stretch>
+              <a:fillRect l="-842" t="0" r="-842" b="0"/>
+            </a:stretch>
+          </a:blipFill>
+        </p:spPr>
+      </p:sp>
+      <p:grpSp>
+        <p:nvGrpSpPr>
+          <p:cNvPr name="Group 7" id="7"/>
+          <p:cNvGrpSpPr/>
+          <p:nvPr/>
+        </p:nvGrpSpPr>
+        <p:grpSpPr>
+          <a:xfrm rot="0">
+            <a:off x="666750" y="666750"/>
+            <a:ext cx="8324850" cy="5667375"/>
+            <a:chOff x="0" y="0"/>
+            <a:chExt cx="11099800" cy="7556500"/>
+          </a:xfrm>
+        </p:grpSpPr>
+        <p:sp>
+          <p:nvSpPr>
+            <p:cNvPr name="TextBox 8" id="8"/>
+            <p:cNvSpPr txBox="true"/>
+            <p:nvPr/>
+          </p:nvSpPr>
+          <p:spPr>
+            <a:xfrm rot="0">
+              <a:off x="0" y="7062682"/>
+              <a:ext cx="9182100" cy="493818"/>
+            </a:xfrm>
+            <a:prstGeom prst="rect">
+              <a:avLst/>
+            </a:prstGeom>
+          </p:spPr>
+          <p:txBody>
+            <a:bodyPr anchor="t" rtlCol="false" tIns="0" lIns="0" bIns="0" rIns="0">
+              <a:spAutoFit/>
+            </a:bodyPr>
+            <a:lstStyle/>
+            <a:p>
+              <a:pPr algn="l" marL="0" indent="0" lvl="0">
+                <a:lnSpc>
+                  <a:spcPts val="3079"/>
+                </a:lnSpc>
+                <a:spcBef>
+                  <a:spcPct val="0"/>
+                </a:spcBef>
+              </a:pPr>
+            </a:p>
+          </p:txBody>
+        </p:sp>
+        <p:sp>
+          <p:nvSpPr>
+            <p:cNvPr name="TextBox 9" id="9"/>
+            <p:cNvSpPr txBox="true"/>
+            <p:nvPr/>
+          </p:nvSpPr>
+          <p:spPr>
+            <a:xfrm rot="0">
+              <a:off x="0" y="28575"/>
+              <a:ext cx="11099800" cy="3078696"/>
+            </a:xfrm>
+            <a:prstGeom prst="rect">
+              <a:avLst/>
+            </a:prstGeom>
+          </p:spPr>
+          <p:txBody>
+            <a:bodyPr anchor="t" rtlCol="false" tIns="0" lIns="0" bIns="0" rIns="0">
+              <a:spAutoFit/>
+            </a:bodyPr>
+            <a:lstStyle/>
+            <a:p>
+              <a:pPr algn="l" marL="0" indent="0" lvl="0">
+                <a:lnSpc>
+                  <a:spcPts val="8800"/>
+                </a:lnSpc>
+                <a:spcBef>
+                  <a:spcPct val="0"/>
+                </a:spcBef>
+              </a:pPr>
+              <a:r>
+                <a:rPr lang="en-US" sz="8000" strike="noStrike" u="none">
+                  <a:solidFill>
+                    <a:srgbClr val="F6F5F2"/>
+                  </a:solidFill>
+                  <a:latin typeface="Helios Extended"/>
+                  <a:ea typeface="Helios Extended"/>
+                  <a:cs typeface="Helios Extended"/>
+                  <a:sym typeface="Helios Extended"/>
+                </a:rPr>
+                <a:t>Da mancha ao plano de ação</a:t>
+              </a:r>
+            </a:p>
+          </p:txBody>
+        </p:sp>
+      </p:grpSp>
+    </p:spTree>
+  </p:cSld>
+  <p:clrMapOvr>
+    <a:masterClrMapping/>
+  </p:clrMapOvr>
+</p:sld>
+</file>
+
+<file path=ppt/slides/slide9.xml><?xml version="1.0" encoding="utf-8"?>
 <p:sld xmlns:p="http://schemas.openxmlformats.org/presentationml/2006/main" xmlns:a="http://schemas.openxmlformats.org/drawingml/2006/main">
   <p:cSld>
     <p:bg>
@@ -5911,895 +7348,6 @@
 </p:sld>
 </file>
 
-<file path=ppt/slides/slide8.xml><?xml version="1.0" encoding="utf-8"?>
-<p:sld xmlns:p="http://schemas.openxmlformats.org/presentationml/2006/main" xmlns:a="http://schemas.openxmlformats.org/drawingml/2006/main">
-  <p:cSld>
-    <p:bg>
-      <p:bgPr>
-        <a:solidFill>
-          <a:srgbClr val="353533"/>
-        </a:solidFill>
-      </p:bgPr>
-    </p:bg>
-    <p:spTree>
-      <p:nvGrpSpPr>
-        <p:cNvPr id="1" name=""/>
-        <p:cNvGrpSpPr/>
-        <p:nvPr/>
-      </p:nvGrpSpPr>
-      <p:grpSpPr>
-        <a:xfrm>
-          <a:off x="0" y="0"/>
-          <a:ext cx="0" cy="0"/>
-          <a:chOff x="0" y="0"/>
-          <a:chExt cx="0" cy="0"/>
-        </a:xfrm>
-      </p:grpSpPr>
-      <p:sp>
-        <p:nvSpPr>
-          <p:cNvPr name="TextBox 2" id="2"/>
-          <p:cNvSpPr txBox="true"/>
-          <p:nvPr/>
-        </p:nvSpPr>
-        <p:spPr>
-          <a:xfrm rot="0">
-            <a:off x="666750" y="695325"/>
-            <a:ext cx="11201400" cy="2301878"/>
-          </a:xfrm>
-          <a:prstGeom prst="rect">
-            <a:avLst/>
-          </a:prstGeom>
-        </p:spPr>
-        <p:txBody>
-          <a:bodyPr anchor="t" rtlCol="false" tIns="0" lIns="0" bIns="0" rIns="0">
-            <a:spAutoFit/>
-          </a:bodyPr>
-          <a:lstStyle/>
-          <a:p>
-            <a:pPr algn="l" marL="0" indent="0" lvl="0">
-              <a:lnSpc>
-                <a:spcPts val="8800"/>
-              </a:lnSpc>
-              <a:spcBef>
-                <a:spcPct val="0"/>
-              </a:spcBef>
-            </a:pPr>
-            <a:r>
-              <a:rPr lang="en-US" sz="8000">
-                <a:solidFill>
-                  <a:srgbClr val="F6F5F2"/>
-                </a:solidFill>
-                <a:latin typeface="Helios Extended"/>
-                <a:ea typeface="Helios Extended"/>
-                <a:cs typeface="Helios Extended"/>
-                <a:sym typeface="Helios Extended"/>
-              </a:rPr>
-              <a:t>O analista volta a pensar</a:t>
-            </a:r>
-          </a:p>
-        </p:txBody>
-      </p:sp>
-      <p:grpSp>
-        <p:nvGrpSpPr>
-          <p:cNvPr name="Group 3" id="3"/>
-          <p:cNvGrpSpPr/>
-          <p:nvPr/>
-        </p:nvGrpSpPr>
-        <p:grpSpPr>
-          <a:xfrm rot="0">
-            <a:off x="666750" y="5143500"/>
-            <a:ext cx="6886575" cy="1579323"/>
-            <a:chOff x="0" y="0"/>
-            <a:chExt cx="9182100" cy="2105764"/>
-          </a:xfrm>
-        </p:grpSpPr>
-        <p:sp>
-          <p:nvSpPr>
-            <p:cNvPr name="TextBox 4" id="4"/>
-            <p:cNvSpPr txBox="true"/>
-            <p:nvPr/>
-          </p:nvSpPr>
-          <p:spPr>
-            <a:xfrm rot="0">
-              <a:off x="0" y="1157837"/>
-              <a:ext cx="9182100" cy="947927"/>
-            </a:xfrm>
-            <a:prstGeom prst="rect">
-              <a:avLst/>
-            </a:prstGeom>
-          </p:spPr>
-          <p:txBody>
-            <a:bodyPr anchor="t" rtlCol="false" tIns="0" lIns="0" bIns="0" rIns="0">
-              <a:spAutoFit/>
-            </a:bodyPr>
-            <a:lstStyle/>
-            <a:p>
-              <a:pPr algn="l" marL="0" indent="0" lvl="0">
-                <a:lnSpc>
-                  <a:spcPts val="2939"/>
-                </a:lnSpc>
-                <a:spcBef>
-                  <a:spcPct val="0"/>
-                </a:spcBef>
-              </a:pPr>
-              <a:r>
-                <a:rPr lang="en-US" sz="2099" strike="noStrike" u="none">
-                  <a:solidFill>
-                    <a:srgbClr val="F6F5F2"/>
-                  </a:solidFill>
-                  <a:latin typeface="Fira Sans Light"/>
-                  <a:ea typeface="Fira Sans Light"/>
-                  <a:cs typeface="Fira Sans Light"/>
-                  <a:sym typeface="Fira Sans Light"/>
-                </a:rPr>
-                <a:t>Com as 7 fontes integradas, o preparo cai de horas para minutos.</a:t>
-              </a:r>
-            </a:p>
-          </p:txBody>
-        </p:sp>
-        <p:sp>
-          <p:nvSpPr>
-            <p:cNvPr name="TextBox 5" id="5"/>
-            <p:cNvSpPr txBox="true"/>
-            <p:nvPr/>
-          </p:nvSpPr>
-          <p:spPr>
-            <a:xfrm rot="0">
-              <a:off x="0" y="-57150"/>
-              <a:ext cx="9182100" cy="578697"/>
-            </a:xfrm>
-            <a:prstGeom prst="rect">
-              <a:avLst/>
-            </a:prstGeom>
-          </p:spPr>
-          <p:txBody>
-            <a:bodyPr anchor="t" rtlCol="false" tIns="0" lIns="0" bIns="0" rIns="0">
-              <a:spAutoFit/>
-            </a:bodyPr>
-            <a:lstStyle/>
-            <a:p>
-              <a:pPr algn="l" marL="0" indent="0" lvl="0">
-                <a:lnSpc>
-                  <a:spcPts val="3640"/>
-                </a:lnSpc>
-              </a:pPr>
-              <a:r>
-                <a:rPr lang="en-US" b="true" sz="2600">
-                  <a:solidFill>
-                    <a:srgbClr val="F6F5F2"/>
-                  </a:solidFill>
-                  <a:latin typeface="Fira Sans Bold"/>
-                  <a:ea typeface="Fira Sans Bold"/>
-                  <a:cs typeface="Fira Sans Bold"/>
-                  <a:sym typeface="Fira Sans Bold"/>
-                </a:rPr>
-                <a:t>FONTES CRUZADAS</a:t>
-              </a:r>
-            </a:p>
-          </p:txBody>
-        </p:sp>
-      </p:grpSp>
-      <p:grpSp>
-        <p:nvGrpSpPr>
-          <p:cNvPr name="Group 6" id="6"/>
-          <p:cNvGrpSpPr/>
-          <p:nvPr/>
-        </p:nvGrpSpPr>
-        <p:grpSpPr>
-          <a:xfrm rot="0">
-            <a:off x="9296400" y="5143500"/>
-            <a:ext cx="6886575" cy="1943606"/>
-            <a:chOff x="0" y="0"/>
-            <a:chExt cx="9182100" cy="2591475"/>
-          </a:xfrm>
-        </p:grpSpPr>
-        <p:sp>
-          <p:nvSpPr>
-            <p:cNvPr name="TextBox 7" id="7"/>
-            <p:cNvSpPr txBox="true"/>
-            <p:nvPr/>
-          </p:nvSpPr>
-          <p:spPr>
-            <a:xfrm rot="0">
-              <a:off x="0" y="1157837"/>
-              <a:ext cx="9182100" cy="1433638"/>
-            </a:xfrm>
-            <a:prstGeom prst="rect">
-              <a:avLst/>
-            </a:prstGeom>
-          </p:spPr>
-          <p:txBody>
-            <a:bodyPr anchor="t" rtlCol="false" tIns="0" lIns="0" bIns="0" rIns="0">
-              <a:spAutoFit/>
-            </a:bodyPr>
-            <a:lstStyle/>
-            <a:p>
-              <a:pPr algn="l" marL="0" indent="0" lvl="0">
-                <a:lnSpc>
-                  <a:spcPts val="2939"/>
-                </a:lnSpc>
-                <a:spcBef>
-                  <a:spcPct val="0"/>
-                </a:spcBef>
-              </a:pPr>
-              <a:r>
-                <a:rPr lang="en-US" sz="2099" strike="noStrike" u="none">
-                  <a:solidFill>
-                    <a:srgbClr val="F6F5F2"/>
-                  </a:solidFill>
-                  <a:latin typeface="Fira Sans Light"/>
-                  <a:ea typeface="Fira Sans Light"/>
-                  <a:cs typeface="Fira Sans Light"/>
-                  <a:sym typeface="Fira Sans Light"/>
-                </a:rPr>
-                <a:t>A reunião continua semanal, mas a preparação para de roubar a semana e os desdobramentos ocorrem em tempo real.</a:t>
-              </a:r>
-            </a:p>
-          </p:txBody>
-        </p:sp>
-        <p:sp>
-          <p:nvSpPr>
-            <p:cNvPr name="TextBox 8" id="8"/>
-            <p:cNvSpPr txBox="true"/>
-            <p:nvPr/>
-          </p:nvSpPr>
-          <p:spPr>
-            <a:xfrm rot="0">
-              <a:off x="0" y="-57150"/>
-              <a:ext cx="9182100" cy="578697"/>
-            </a:xfrm>
-            <a:prstGeom prst="rect">
-              <a:avLst/>
-            </a:prstGeom>
-          </p:spPr>
-          <p:txBody>
-            <a:bodyPr anchor="t" rtlCol="false" tIns="0" lIns="0" bIns="0" rIns="0">
-              <a:spAutoFit/>
-            </a:bodyPr>
-            <a:lstStyle/>
-            <a:p>
-              <a:pPr algn="l" marL="0" indent="0" lvl="0">
-                <a:lnSpc>
-                  <a:spcPts val="3640"/>
-                </a:lnSpc>
-              </a:pPr>
-              <a:r>
-                <a:rPr lang="en-US" b="true" sz="2600">
-                  <a:solidFill>
-                    <a:srgbClr val="F6F5F2"/>
-                  </a:solidFill>
-                  <a:latin typeface="Fira Sans Bold"/>
-                  <a:ea typeface="Fira Sans Bold"/>
-                  <a:cs typeface="Fira Sans Bold"/>
-                  <a:sym typeface="Fira Sans Bold"/>
-                </a:rPr>
-                <a:t>DECISÃO APRIMORADA</a:t>
-              </a:r>
-            </a:p>
-          </p:txBody>
-        </p:sp>
-      </p:grpSp>
-      <p:grpSp>
-        <p:nvGrpSpPr>
-          <p:cNvPr name="Group 9" id="9"/>
-          <p:cNvGrpSpPr/>
-          <p:nvPr/>
-        </p:nvGrpSpPr>
-        <p:grpSpPr>
-          <a:xfrm rot="5400000">
-            <a:off x="9068162" y="1029062"/>
-            <a:ext cx="189775" cy="18326100"/>
-            <a:chOff x="0" y="0"/>
-            <a:chExt cx="49982" cy="4826627"/>
-          </a:xfrm>
-        </p:grpSpPr>
-        <p:sp>
-          <p:nvSpPr>
-            <p:cNvPr name="Freeform 10" id="10"/>
-            <p:cNvSpPr/>
-            <p:nvPr/>
-          </p:nvSpPr>
-          <p:spPr>
-            <a:xfrm flipH="false" flipV="false" rot="0">
-              <a:off x="0" y="0"/>
-              <a:ext cx="49982" cy="4826627"/>
-            </a:xfrm>
-            <a:custGeom>
-              <a:avLst/>
-              <a:gdLst/>
-              <a:ahLst/>
-              <a:cxnLst/>
-              <a:rect r="r" b="b" t="t" l="l"/>
-              <a:pathLst>
-                <a:path h="4826627" w="49982">
-                  <a:moveTo>
-                    <a:pt x="0" y="0"/>
-                  </a:moveTo>
-                  <a:lnTo>
-                    <a:pt x="49982" y="0"/>
-                  </a:lnTo>
-                  <a:lnTo>
-                    <a:pt x="49982" y="4826627"/>
-                  </a:lnTo>
-                  <a:lnTo>
-                    <a:pt x="0" y="4826627"/>
-                  </a:lnTo>
-                  <a:close/>
-                </a:path>
-              </a:pathLst>
-            </a:custGeom>
-            <a:solidFill>
-              <a:srgbClr val="F6F5F2"/>
-            </a:solidFill>
-          </p:spPr>
-        </p:sp>
-        <p:sp>
-          <p:nvSpPr>
-            <p:cNvPr name="TextBox 11" id="11"/>
-            <p:cNvSpPr txBox="true"/>
-            <p:nvPr/>
-          </p:nvSpPr>
-          <p:spPr>
-            <a:xfrm>
-              <a:off x="0" y="-47625"/>
-              <a:ext cx="49982" cy="4874252"/>
-            </a:xfrm>
-            <a:prstGeom prst="rect">
-              <a:avLst/>
-            </a:prstGeom>
-          </p:spPr>
-          <p:txBody>
-            <a:bodyPr anchor="ctr" rtlCol="false" tIns="50800" lIns="50800" bIns="50800" rIns="50800"/>
-            <a:lstStyle/>
-            <a:p>
-              <a:pPr algn="ctr">
-                <a:lnSpc>
-                  <a:spcPts val="3359"/>
-                </a:lnSpc>
-              </a:pPr>
-            </a:p>
-          </p:txBody>
-        </p:sp>
-      </p:grpSp>
-    </p:spTree>
-  </p:cSld>
-  <p:clrMapOvr>
-    <a:masterClrMapping/>
-  </p:clrMapOvr>
-</p:sld>
-</file>
-
-<file path=ppt/slides/slide9.xml><?xml version="1.0" encoding="utf-8"?>
-<p:sld xmlns:p="http://schemas.openxmlformats.org/presentationml/2006/main" xmlns:a="http://schemas.openxmlformats.org/drawingml/2006/main" xmlns:r="http://schemas.openxmlformats.org/officeDocument/2006/relationships">
-  <p:cSld>
-    <p:bg>
-      <p:bgPr>
-        <a:solidFill>
-          <a:srgbClr val="353533"/>
-        </a:solidFill>
-      </p:bgPr>
-    </p:bg>
-    <p:spTree>
-      <p:nvGrpSpPr>
-        <p:cNvPr id="1" name=""/>
-        <p:cNvGrpSpPr/>
-        <p:nvPr/>
-      </p:nvGrpSpPr>
-      <p:grpSpPr>
-        <a:xfrm>
-          <a:off x="0" y="0"/>
-          <a:ext cx="0" cy="0"/>
-          <a:chOff x="0" y="0"/>
-          <a:chExt cx="0" cy="0"/>
-        </a:xfrm>
-      </p:grpSpPr>
-      <p:grpSp>
-        <p:nvGrpSpPr>
-          <p:cNvPr name="Group 2" id="2"/>
-          <p:cNvGrpSpPr/>
-          <p:nvPr/>
-        </p:nvGrpSpPr>
-        <p:grpSpPr>
-          <a:xfrm rot="0">
-            <a:off x="10734675" y="666750"/>
-            <a:ext cx="6886575" cy="8966200"/>
-            <a:chOff x="0" y="0"/>
-            <a:chExt cx="1546294" cy="2013248"/>
-          </a:xfrm>
-        </p:grpSpPr>
-        <p:sp>
-          <p:nvSpPr>
-            <p:cNvPr name="Freeform 3" id="3"/>
-            <p:cNvSpPr/>
-            <p:nvPr/>
-          </p:nvSpPr>
-          <p:spPr>
-            <a:xfrm flipH="false" flipV="false" rot="0">
-              <a:off x="0" y="0"/>
-              <a:ext cx="1546294" cy="2013248"/>
-            </a:xfrm>
-            <a:custGeom>
-              <a:avLst/>
-              <a:gdLst/>
-              <a:ahLst/>
-              <a:cxnLst/>
-              <a:rect r="r" b="b" t="t" l="l"/>
-              <a:pathLst>
-                <a:path h="2013248" w="1546294">
-                  <a:moveTo>
-                    <a:pt x="0" y="0"/>
-                  </a:moveTo>
-                  <a:lnTo>
-                    <a:pt x="1546294" y="0"/>
-                  </a:lnTo>
-                  <a:lnTo>
-                    <a:pt x="1546294" y="2013248"/>
-                  </a:lnTo>
-                  <a:lnTo>
-                    <a:pt x="0" y="2013248"/>
-                  </a:lnTo>
-                  <a:close/>
-                </a:path>
-              </a:pathLst>
-            </a:custGeom>
-            <a:blipFill>
-              <a:blip r:embed="rId2"/>
-              <a:stretch>
-                <a:fillRect l="-41159" t="0" r="6275" b="59627"/>
-              </a:stretch>
-            </a:blipFill>
-          </p:spPr>
-        </p:sp>
-      </p:grpSp>
-      <p:grpSp>
-        <p:nvGrpSpPr>
-          <p:cNvPr name="Group 4" id="4"/>
-          <p:cNvGrpSpPr/>
-          <p:nvPr/>
-        </p:nvGrpSpPr>
-        <p:grpSpPr>
-          <a:xfrm rot="0">
-            <a:off x="10734675" y="666750"/>
-            <a:ext cx="6886575" cy="8966200"/>
-            <a:chOff x="0" y="0"/>
-            <a:chExt cx="1813748" cy="2361468"/>
-          </a:xfrm>
-        </p:grpSpPr>
-        <p:sp>
-          <p:nvSpPr>
-            <p:cNvPr name="Freeform 5" id="5"/>
-            <p:cNvSpPr/>
-            <p:nvPr/>
-          </p:nvSpPr>
-          <p:spPr>
-            <a:xfrm flipH="false" flipV="false" rot="0">
-              <a:off x="0" y="0"/>
-              <a:ext cx="1813748" cy="2361468"/>
-            </a:xfrm>
-            <a:custGeom>
-              <a:avLst/>
-              <a:gdLst/>
-              <a:ahLst/>
-              <a:cxnLst/>
-              <a:rect r="r" b="b" t="t" l="l"/>
-              <a:pathLst>
-                <a:path h="2361468" w="1813748">
-                  <a:moveTo>
-                    <a:pt x="0" y="0"/>
-                  </a:moveTo>
-                  <a:lnTo>
-                    <a:pt x="1813748" y="0"/>
-                  </a:lnTo>
-                  <a:lnTo>
-                    <a:pt x="1813748" y="2361468"/>
-                  </a:lnTo>
-                  <a:lnTo>
-                    <a:pt x="0" y="2361468"/>
-                  </a:lnTo>
-                  <a:close/>
-                </a:path>
-              </a:pathLst>
-            </a:custGeom>
-            <a:solidFill>
-              <a:srgbClr val="F6F5F2"/>
-            </a:solidFill>
-          </p:spPr>
-        </p:sp>
-        <p:sp>
-          <p:nvSpPr>
-            <p:cNvPr name="TextBox 6" id="6"/>
-            <p:cNvSpPr txBox="true"/>
-            <p:nvPr/>
-          </p:nvSpPr>
-          <p:spPr>
-            <a:xfrm>
-              <a:off x="0" y="-47625"/>
-              <a:ext cx="1813748" cy="2409093"/>
-            </a:xfrm>
-            <a:prstGeom prst="rect">
-              <a:avLst/>
-            </a:prstGeom>
-          </p:spPr>
-          <p:txBody>
-            <a:bodyPr anchor="ctr" rtlCol="false" tIns="50800" lIns="50800" bIns="50800" rIns="50800"/>
-            <a:lstStyle/>
-            <a:p>
-              <a:pPr algn="ctr">
-                <a:lnSpc>
-                  <a:spcPts val="2940"/>
-                </a:lnSpc>
-              </a:pPr>
-            </a:p>
-          </p:txBody>
-        </p:sp>
-      </p:grpSp>
-      <p:sp>
-        <p:nvSpPr>
-          <p:cNvPr name="TextBox 7" id="7"/>
-          <p:cNvSpPr txBox="true"/>
-          <p:nvPr/>
-        </p:nvSpPr>
-        <p:spPr>
-          <a:xfrm rot="0">
-            <a:off x="666750" y="771525"/>
-            <a:ext cx="8946860" cy="3150236"/>
-          </a:xfrm>
-          <a:prstGeom prst="rect">
-            <a:avLst/>
-          </a:prstGeom>
-        </p:spPr>
-        <p:txBody>
-          <a:bodyPr anchor="t" rtlCol="false" tIns="0" lIns="0" bIns="0" rIns="0">
-            <a:spAutoFit/>
-          </a:bodyPr>
-          <a:lstStyle/>
-          <a:p>
-            <a:pPr algn="l" marL="0" indent="0" lvl="0">
-              <a:lnSpc>
-                <a:spcPts val="8000"/>
-              </a:lnSpc>
-              <a:spcBef>
-                <a:spcPct val="0"/>
-              </a:spcBef>
-            </a:pPr>
-            <a:r>
-              <a:rPr lang="en-US" b="true" sz="8000" strike="noStrike" u="none">
-                <a:solidFill>
-                  <a:srgbClr val="F6F5F2"/>
-                </a:solidFill>
-                <a:latin typeface="Helios Extended Bold"/>
-                <a:ea typeface="Helios Extended Bold"/>
-                <a:cs typeface="Helios Extended Bold"/>
-                <a:sym typeface="Helios Extended Bold"/>
-              </a:rPr>
-              <a:t>O Rio já tem os dados. Falta </a:t>
-            </a:r>
-            <a:r>
-              <a:rPr lang="en-US" b="true" sz="8000" strike="noStrike" u="sng">
-                <a:solidFill>
-                  <a:srgbClr val="FFBD59"/>
-                </a:solidFill>
-                <a:latin typeface="Helios Extended Bold"/>
-                <a:ea typeface="Helios Extended Bold"/>
-                <a:cs typeface="Helios Extended Bold"/>
-                <a:sym typeface="Helios Extended Bold"/>
-              </a:rPr>
-              <a:t>acelerar</a:t>
-            </a:r>
-            <a:r>
-              <a:rPr lang="en-US" b="true" sz="8000" strike="noStrike" u="none">
-                <a:solidFill>
-                  <a:srgbClr val="F6F5F2"/>
-                </a:solidFill>
-                <a:latin typeface="Helios Extended Bold"/>
-                <a:ea typeface="Helios Extended Bold"/>
-                <a:cs typeface="Helios Extended Bold"/>
-                <a:sym typeface="Helios Extended Bold"/>
-              </a:rPr>
-              <a:t>.</a:t>
-            </a:r>
-          </a:p>
-        </p:txBody>
-      </p:sp>
-      <p:grpSp>
-        <p:nvGrpSpPr>
-          <p:cNvPr name="Group 8" id="8"/>
-          <p:cNvGrpSpPr/>
-          <p:nvPr/>
-        </p:nvGrpSpPr>
-        <p:grpSpPr>
-          <a:xfrm rot="0">
-            <a:off x="666750" y="5143500"/>
-            <a:ext cx="5448300" cy="4399451"/>
-            <a:chOff x="0" y="0"/>
-            <a:chExt cx="7264400" cy="5865935"/>
-          </a:xfrm>
-        </p:grpSpPr>
-        <p:sp>
-          <p:nvSpPr>
-            <p:cNvPr name="TextBox 9" id="9"/>
-            <p:cNvSpPr txBox="true"/>
-            <p:nvPr/>
-          </p:nvSpPr>
-          <p:spPr>
-            <a:xfrm rot="0">
-              <a:off x="0" y="3018986"/>
-              <a:ext cx="7264400" cy="462216"/>
-            </a:xfrm>
-            <a:prstGeom prst="rect">
-              <a:avLst/>
-            </a:prstGeom>
-          </p:spPr>
-          <p:txBody>
-            <a:bodyPr anchor="t" rtlCol="false" tIns="0" lIns="0" bIns="0" rIns="0">
-              <a:spAutoFit/>
-            </a:bodyPr>
-            <a:lstStyle/>
-            <a:p>
-              <a:pPr algn="l" marL="0" indent="0" lvl="0">
-                <a:lnSpc>
-                  <a:spcPts val="2939"/>
-                </a:lnSpc>
-              </a:pPr>
-              <a:r>
-                <a:rPr lang="en-US" sz="2099">
-                  <a:solidFill>
-                    <a:srgbClr val="F6F5F2"/>
-                  </a:solidFill>
-                  <a:latin typeface="Fira Sans Light"/>
-                  <a:ea typeface="Fira Sans Light"/>
-                  <a:cs typeface="Fira Sans Light"/>
-                  <a:sym typeface="Fira Sans Light"/>
-                </a:rPr>
-                <a:t>https://compstat.vercel.app/</a:t>
-              </a:r>
-            </a:p>
-          </p:txBody>
-        </p:sp>
-        <p:sp>
-          <p:nvSpPr>
-            <p:cNvPr name="TextBox 10" id="10"/>
-            <p:cNvSpPr txBox="true"/>
-            <p:nvPr/>
-          </p:nvSpPr>
-          <p:spPr>
-            <a:xfrm rot="0">
-              <a:off x="0" y="2321968"/>
-              <a:ext cx="7264400" cy="578697"/>
-            </a:xfrm>
-            <a:prstGeom prst="rect">
-              <a:avLst/>
-            </a:prstGeom>
-          </p:spPr>
-          <p:txBody>
-            <a:bodyPr anchor="t" rtlCol="false" tIns="0" lIns="0" bIns="0" rIns="0">
-              <a:spAutoFit/>
-            </a:bodyPr>
-            <a:lstStyle/>
-            <a:p>
-              <a:pPr algn="l" marL="0" indent="0" lvl="0">
-                <a:lnSpc>
-                  <a:spcPts val="3640"/>
-                </a:lnSpc>
-              </a:pPr>
-              <a:r>
-                <a:rPr lang="en-US" b="true" sz="2600">
-                  <a:solidFill>
-                    <a:srgbClr val="F6F5F2"/>
-                  </a:solidFill>
-                  <a:latin typeface="Fira Sans Bold"/>
-                  <a:ea typeface="Fira Sans Bold"/>
-                  <a:cs typeface="Fira Sans Bold"/>
-                  <a:sym typeface="Fira Sans Bold"/>
-                </a:rPr>
-                <a:t>WEBSITE</a:t>
-              </a:r>
-            </a:p>
-          </p:txBody>
-        </p:sp>
-        <p:sp>
-          <p:nvSpPr>
-            <p:cNvPr name="TextBox 11" id="11"/>
-            <p:cNvSpPr txBox="true"/>
-            <p:nvPr/>
-          </p:nvSpPr>
-          <p:spPr>
-            <a:xfrm rot="0">
-              <a:off x="0" y="639868"/>
-              <a:ext cx="7264400" cy="462216"/>
-            </a:xfrm>
-            <a:prstGeom prst="rect">
-              <a:avLst/>
-            </a:prstGeom>
-          </p:spPr>
-          <p:txBody>
-            <a:bodyPr anchor="t" rtlCol="false" tIns="0" lIns="0" bIns="0" rIns="0">
-              <a:spAutoFit/>
-            </a:bodyPr>
-            <a:lstStyle/>
-            <a:p>
-              <a:pPr algn="l" marL="0" indent="0" lvl="0">
-                <a:lnSpc>
-                  <a:spcPts val="2939"/>
-                </a:lnSpc>
-                <a:spcBef>
-                  <a:spcPct val="0"/>
-                </a:spcBef>
-              </a:pPr>
-              <a:r>
-                <a:rPr lang="en-US" sz="2099">
-                  <a:solidFill>
-                    <a:srgbClr val="F6F5F2"/>
-                  </a:solidFill>
-                  <a:latin typeface="Fira Sans Light"/>
-                  <a:ea typeface="Fira Sans Light"/>
-                  <a:cs typeface="Fira Sans Light"/>
-                  <a:sym typeface="Fira Sans Light"/>
-                </a:rPr>
-                <a:t>+55 21 99756-6769</a:t>
-              </a:r>
-            </a:p>
-          </p:txBody>
-        </p:sp>
-        <p:sp>
-          <p:nvSpPr>
-            <p:cNvPr name="TextBox 12" id="12"/>
-            <p:cNvSpPr txBox="true"/>
-            <p:nvPr/>
-          </p:nvSpPr>
-          <p:spPr>
-            <a:xfrm rot="0">
-              <a:off x="0" y="-57150"/>
-              <a:ext cx="7264400" cy="578697"/>
-            </a:xfrm>
-            <a:prstGeom prst="rect">
-              <a:avLst/>
-            </a:prstGeom>
-          </p:spPr>
-          <p:txBody>
-            <a:bodyPr anchor="t" rtlCol="false" tIns="0" lIns="0" bIns="0" rIns="0">
-              <a:spAutoFit/>
-            </a:bodyPr>
-            <a:lstStyle/>
-            <a:p>
-              <a:pPr algn="l" marL="0" indent="0" lvl="0">
-                <a:lnSpc>
-                  <a:spcPts val="3640"/>
-                </a:lnSpc>
-              </a:pPr>
-              <a:r>
-                <a:rPr lang="en-US" b="true" sz="2600">
-                  <a:solidFill>
-                    <a:srgbClr val="F6F5F2"/>
-                  </a:solidFill>
-                  <a:latin typeface="Fira Sans Bold"/>
-                  <a:ea typeface="Fira Sans Bold"/>
-                  <a:cs typeface="Fira Sans Bold"/>
-                  <a:sym typeface="Fira Sans Bold"/>
-                </a:rPr>
-                <a:t>TELEFONE</a:t>
-              </a:r>
-            </a:p>
-          </p:txBody>
-        </p:sp>
-        <p:sp>
-          <p:nvSpPr>
-            <p:cNvPr name="TextBox 13" id="13"/>
-            <p:cNvSpPr txBox="true"/>
-            <p:nvPr/>
-          </p:nvSpPr>
-          <p:spPr>
-            <a:xfrm rot="0">
-              <a:off x="0" y="5403719"/>
-              <a:ext cx="7264400" cy="462216"/>
-            </a:xfrm>
-            <a:prstGeom prst="rect">
-              <a:avLst/>
-            </a:prstGeom>
-          </p:spPr>
-          <p:txBody>
-            <a:bodyPr anchor="t" rtlCol="false" tIns="0" lIns="0" bIns="0" rIns="0">
-              <a:spAutoFit/>
-            </a:bodyPr>
-            <a:lstStyle/>
-            <a:p>
-              <a:pPr algn="l" marL="0" indent="0" lvl="0">
-                <a:lnSpc>
-                  <a:spcPts val="2939"/>
-                </a:lnSpc>
-                <a:spcBef>
-                  <a:spcPct val="0"/>
-                </a:spcBef>
-              </a:pPr>
-              <a:r>
-                <a:rPr lang="en-US" sz="2099">
-                  <a:solidFill>
-                    <a:srgbClr val="F6F5F2"/>
-                  </a:solidFill>
-                  <a:latin typeface="Fira Sans Light"/>
-                  <a:ea typeface="Fira Sans Light"/>
-                  <a:cs typeface="Fira Sans Light"/>
-                  <a:sym typeface="Fira Sans Light"/>
-                </a:rPr>
-                <a:t>leandromaveiro@hotmail.com</a:t>
-              </a:r>
-            </a:p>
-          </p:txBody>
-        </p:sp>
-        <p:sp>
-          <p:nvSpPr>
-            <p:cNvPr name="TextBox 14" id="14"/>
-            <p:cNvSpPr txBox="true"/>
-            <p:nvPr/>
-          </p:nvSpPr>
-          <p:spPr>
-            <a:xfrm rot="0">
-              <a:off x="0" y="4706701"/>
-              <a:ext cx="7264400" cy="578697"/>
-            </a:xfrm>
-            <a:prstGeom prst="rect">
-              <a:avLst/>
-            </a:prstGeom>
-          </p:spPr>
-          <p:txBody>
-            <a:bodyPr anchor="t" rtlCol="false" tIns="0" lIns="0" bIns="0" rIns="0">
-              <a:spAutoFit/>
-            </a:bodyPr>
-            <a:lstStyle/>
-            <a:p>
-              <a:pPr algn="l" marL="0" indent="0" lvl="0">
-                <a:lnSpc>
-                  <a:spcPts val="3640"/>
-                </a:lnSpc>
-              </a:pPr>
-              <a:r>
-                <a:rPr lang="en-US" b="true" sz="2600">
-                  <a:solidFill>
-                    <a:srgbClr val="F6F5F2"/>
-                  </a:solidFill>
-                  <a:latin typeface="Fira Sans Bold"/>
-                  <a:ea typeface="Fira Sans Bold"/>
-                  <a:cs typeface="Fira Sans Bold"/>
-                  <a:sym typeface="Fira Sans Bold"/>
-                </a:rPr>
-                <a:t>EMAIL</a:t>
-              </a:r>
-            </a:p>
-          </p:txBody>
-        </p:sp>
-      </p:grpSp>
-      <p:pic>
-        <p:nvPicPr>
-          <p:cNvPr name="Picture 15" id="15"/>
-          <p:cNvPicPr>
-            <a:picLocks noChangeAspect="true"/>
-          </p:cNvPicPr>
-          <p:nvPr/>
-        </p:nvPicPr>
-        <p:blipFill>
-          <a:blip r:embed="rId3"/>
-          <a:stretch>
-            <a:fillRect/>
-          </a:stretch>
-        </p:blipFill>
-        <p:spPr>
-          <a:xfrm rot="0">
-            <a:off x="11393292" y="2365180"/>
-            <a:ext cx="5569339" cy="5569339"/>
-          </a:xfrm>
-          <a:prstGeom prst="rect">
-            <a:avLst/>
-          </a:prstGeom>
-        </p:spPr>
-      </p:pic>
-    </p:spTree>
-  </p:cSld>
-  <p:clrMapOvr>
-    <a:masterClrMapping/>
-  </p:clrMapOvr>
-</p:sld>
-</file>
-
 <file path=ppt/theme/theme1.xml><?xml version="1.0" encoding="utf-8"?>
 <a:theme xmlns:a="http://schemas.openxmlformats.org/drawingml/2006/main" name="Office Theme">
   <a:themeElements>
